--- a/deck/AraCare_Defense.pptx
+++ b/deck/AraCare_Defense.pptx
@@ -2894,7 +2894,7 @@
                 <a:ea typeface="Calibri" pitchFamily="34" charset="-122"/>
                 <a:cs typeface="Calibri" pitchFamily="34" charset="-120"/>
               </a:rPr>
-              <a:t>[Your name]  ·  [Matric no.]  ·  Supervisor: [Name]  ·  [Department]</a:t>
+              <a:t>Joseph Cosmos Aniebiet  ·  22/SC/CO/1301  ·  Computer Science</a:t>
             </a:r>
             <a:endParaRPr lang="en-US" sz="1200" dirty="0"/>
           </a:p>
